--- a/templates/emerald_nature.pptx
+++ b/templates/emerald_nature.pptx
@@ -3217,41 +3217,6 @@
         </p:nvSpPr>
         <p:spPr>
           <a:xfrm>
-            <a:off x="731520" y="731520"/>
-            <a:ext cx="3657600" cy="548640"/>
-          </a:xfrm>
-          <a:prstGeom prst="rect">
-            <a:avLst/>
-          </a:prstGeom>
-          <a:noFill/>
-        </p:spPr>
-        <p:txBody>
-          <a:bodyPr wrap="none">
-            <a:spAutoFit/>
-          </a:bodyPr>
-          <a:lstStyle/>
-          <a:p>
-            <a:pPr>
-              <a:defRPr sz="1400" b="1">
-                <a:solidFill>
-                  <a:srgbClr val="10B981"/>
-                </a:solidFill>
-              </a:defRPr>
-            </a:pPr>
-            <a:r>
-              <a:t>MOTHER AI</a:t>
-            </a:r>
-          </a:p>
-        </p:txBody>
-      </p:sp>
-      <p:sp>
-        <p:nvSpPr>
-          <p:cNvPr id="7" name="TextBox 6"/>
-          <p:cNvSpPr txBox="1"/>
-          <p:nvPr/>
-        </p:nvSpPr>
-        <p:spPr>
-          <a:xfrm>
             <a:off x="1097280" y="1828800"/>
             <a:ext cx="10058400" cy="1645920"/>
           </a:xfrm>
@@ -3269,47 +3234,12 @@
             <a:pPr>
               <a:defRPr sz="4400" b="1">
                 <a:solidFill>
-                  <a:srgbClr val="F0FDF4"/>
+                  <a:srgbClr val="FFFFFF"/>
                 </a:solidFill>
               </a:defRPr>
             </a:pPr>
             <a:r>
-              <a:t>Emerald Eco &amp; Sustainability Cover</a:t>
-            </a:r>
-          </a:p>
-        </p:txBody>
-      </p:sp>
-      <p:sp>
-        <p:nvSpPr>
-          <p:cNvPr id="8" name="TextBox 7"/>
-          <p:cNvSpPr txBox="1"/>
-          <p:nvPr/>
-        </p:nvSpPr>
-        <p:spPr>
-          <a:xfrm>
-            <a:off x="1097280" y="3657600"/>
-            <a:ext cx="10058400" cy="1097280"/>
-          </a:xfrm>
-          <a:prstGeom prst="rect">
-            <a:avLst/>
-          </a:prstGeom>
-          <a:noFill/>
-        </p:spPr>
-        <p:txBody>
-          <a:bodyPr wrap="none">
-            <a:spAutoFit/>
-          </a:bodyPr>
-          <a:lstStyle/>
-          <a:p>
-            <a:pPr>
-              <a:defRPr sz="2200">
-                <a:solidFill>
-                  <a:srgbClr val="34D399"/>
-                </a:solidFill>
-              </a:defRPr>
-            </a:pPr>
-            <a:r>
-              <a:t>Predefined Slide Master Template</a:t>
+              <a:t>Emerald Eco &amp; Sustainability</a:t>
             </a:r>
           </a:p>
         </p:txBody>
@@ -3375,7 +3305,50 @@
         <p:spPr>
           <a:xfrm>
             <a:off x="0" y="0"/>
-            <a:ext cx="12191695" cy="73152"/>
+            <a:ext cx="12191695" cy="6858000"/>
+          </a:xfrm>
+          <a:prstGeom prst="rect">
+            <a:avLst/>
+          </a:prstGeom>
+          <a:solidFill>
+            <a:srgbClr val="022C22"/>
+          </a:solidFill>
+          <a:ln>
+            <a:noFill/>
+          </a:ln>
+        </p:spPr>
+        <p:style>
+          <a:lnRef idx="1">
+            <a:schemeClr val="accent1"/>
+          </a:lnRef>
+          <a:fillRef idx="3">
+            <a:schemeClr val="accent1"/>
+          </a:fillRef>
+          <a:effectRef idx="2">
+            <a:schemeClr val="accent1"/>
+          </a:effectRef>
+          <a:fontRef idx="minor">
+            <a:schemeClr val="lt1"/>
+          </a:fontRef>
+        </p:style>
+        <p:txBody>
+          <a:bodyPr rtlCol="0" anchor="ctr"/>
+          <a:lstStyle/>
+          <a:p>
+            <a:pPr algn="ctr"/>
+          </a:p>
+        </p:txBody>
+      </p:sp>
+      <p:sp>
+        <p:nvSpPr>
+          <p:cNvPr id="5" name="Rectangle 4"/>
+          <p:cNvSpPr/>
+          <p:nvPr/>
+        </p:nvSpPr>
+        <p:spPr>
+          <a:xfrm>
+            <a:off x="0" y="0"/>
+            <a:ext cx="12191695" cy="91440"/>
           </a:xfrm>
           <a:prstGeom prst="rect">
             <a:avLst/>
@@ -3411,41 +3384,6 @@
       </p:sp>
       <p:sp>
         <p:nvSpPr>
-          <p:cNvPr id="5" name="TextBox 4"/>
-          <p:cNvSpPr txBox="1"/>
-          <p:nvPr/>
-        </p:nvSpPr>
-        <p:spPr>
-          <a:xfrm>
-            <a:off x="731520" y="320040"/>
-            <a:ext cx="8686800" cy="731520"/>
-          </a:xfrm>
-          <a:prstGeom prst="rect">
-            <a:avLst/>
-          </a:prstGeom>
-          <a:noFill/>
-        </p:spPr>
-        <p:txBody>
-          <a:bodyPr wrap="none">
-            <a:spAutoFit/>
-          </a:bodyPr>
-          <a:lstStyle/>
-          <a:p>
-            <a:pPr>
-              <a:defRPr sz="2800" b="1">
-                <a:solidFill>
-                  <a:srgbClr val="FFFFFF"/>
-                </a:solidFill>
-              </a:defRPr>
-            </a:pPr>
-            <a:r>
-              <a:t>Slide Header Title</a:t>
-            </a:r>
-          </a:p>
-        </p:txBody>
-      </p:sp>
-      <p:sp>
-        <p:nvSpPr>
           <p:cNvPr id="6" name="Rounded Rectangle 5"/>
           <p:cNvSpPr/>
           <p:nvPr/>
@@ -3453,7 +3391,7 @@
         <p:spPr>
           <a:xfrm>
             <a:off x="731520" y="1188720"/>
-            <a:ext cx="10728655" cy="4846320"/>
+            <a:ext cx="10728655" cy="5029200"/>
           </a:xfrm>
           <a:prstGeom prst="roundRect">
             <a:avLst/>
@@ -3461,7 +3399,7 @@
           <a:solidFill>
             <a:srgbClr val="064E3B"/>
           </a:solidFill>
-          <a:ln w="12700">
+          <a:ln w="19050">
             <a:solidFill>
               <a:srgbClr val="047857"/>
             </a:solidFill>
